--- a/madd-decks/dagger-alif/06-seen-sheen.pptx
+++ b/madd-decks/dagger-alif/06-seen-sheen.pptx
@@ -4,6 +4,9 @@
   <p:sldMasterIdLst>
     <p:sldMasterId id="2147483648" r:id="rId1"/>
   </p:sldMasterIdLst>
+  <p:notesMasterIdLst>
+    <p:notesMasterId r:id="rId27"/>
+  </p:notesMasterIdLst>
   <p:sldIdLst>
     <p:sldId id="256" r:id="rId2"/>
     <p:sldId id="257" r:id="rId3"/>
@@ -31,9 +34,6 @@
     <p:sldId id="279" r:id="rId25"/>
     <p:sldId id="280" r:id="rId26"/>
   </p:sldIdLst>
-  <p:notesMasterIdLst>
-    <p:notesMasterId r:id="rId27"/>
-  </p:notesMasterIdLst>
   <p:sldSz cx="9144000" cy="5143500"/>
   <p:notesSz cx="5143500" cy="9144000"/>
   <p:defaultTextStyle>
@@ -4844,9 +4844,6 @@
               </a:rPr>
               <a:t>شَ</a:t>
             </a:r>
-            <a:pPr algn="ctr" indent="0" marL="0">
-              <a:buNone/>
-            </a:pPr>
             <a:r>
               <a:rPr lang="ar-SA" altLang="en-US" sz="5850" dirty="0">
                 <a:solidFill>
@@ -4858,9 +4855,6 @@
               </a:rPr>
               <a:t>ا</a:t>
             </a:r>
-            <a:pPr algn="ctr" indent="0" marL="0">
-              <a:buNone/>
-            </a:pPr>
             <a:r>
               <a:rPr lang="ar-SA" altLang="en-US" sz="9000" dirty="0">
                 <a:solidFill>
@@ -6283,9 +6277,6 @@
               </a:rPr>
               <a:t>شَ</a:t>
             </a:r>
-            <a:pPr algn="ctr" indent="0" marL="0">
-              <a:buNone/>
-            </a:pPr>
             <a:r>
               <a:rPr lang="ar-SA" altLang="en-US" sz="5850" dirty="0">
                 <a:solidFill>
@@ -6297,9 +6288,6 @@
               </a:rPr>
               <a:t>ا</a:t>
             </a:r>
-            <a:pPr algn="ctr" indent="0" marL="0">
-              <a:buNone/>
-            </a:pPr>
             <a:r>
               <a:rPr lang="ar-SA" altLang="en-US" sz="9000" dirty="0">
                 <a:solidFill>
@@ -7722,9 +7710,6 @@
               </a:rPr>
               <a:t>شَ</a:t>
             </a:r>
-            <a:pPr algn="ctr" indent="0" marL="0">
-              <a:buNone/>
-            </a:pPr>
             <a:r>
               <a:rPr lang="ar-SA" altLang="en-US" sz="5850" dirty="0">
                 <a:solidFill>
@@ -7736,9 +7721,6 @@
               </a:rPr>
               <a:t>ا</a:t>
             </a:r>
-            <a:pPr algn="ctr" indent="0" marL="0">
-              <a:buNone/>
-            </a:pPr>
             <a:r>
               <a:rPr lang="ar-SA" altLang="en-US" sz="9000" dirty="0">
                 <a:solidFill>
@@ -9161,9 +9143,6 @@
               </a:rPr>
               <a:t>شَ</a:t>
             </a:r>
-            <a:pPr algn="ctr" indent="0" marL="0">
-              <a:buNone/>
-            </a:pPr>
             <a:r>
               <a:rPr lang="ar-SA" altLang="en-US" sz="5850" dirty="0">
                 <a:solidFill>
@@ -9175,9 +9154,6 @@
               </a:rPr>
               <a:t>ا</a:t>
             </a:r>
-            <a:pPr algn="ctr" indent="0" marL="0">
-              <a:buNone/>
-            </a:pPr>
             <a:r>
               <a:rPr lang="ar-SA" altLang="en-US" sz="9000" dirty="0">
                 <a:solidFill>
@@ -10728,9 +10704,6 @@
               </a:rPr>
               <a:t>جَلَسَ</a:t>
             </a:r>
-            <a:pPr algn="ctr" indent="0" marL="0">
-              <a:buNone/>
-            </a:pPr>
             <a:r>
               <a:rPr lang="ar-SA" altLang="en-US" sz="4290" dirty="0">
                 <a:solidFill>
@@ -12443,9 +12416,6 @@
               </a:rPr>
               <a:t>لَمَسَ</a:t>
             </a:r>
-            <a:pPr algn="ctr" indent="0" marL="0">
-              <a:buNone/>
-            </a:pPr>
             <a:r>
               <a:rPr lang="ar-SA" altLang="en-US" sz="4290" dirty="0">
                 <a:solidFill>
@@ -14158,9 +14128,6 @@
               </a:rPr>
               <a:t>غَرَسَ</a:t>
             </a:r>
-            <a:pPr algn="ctr" indent="0" marL="0">
-              <a:buNone/>
-            </a:pPr>
             <a:r>
               <a:rPr lang="ar-SA" altLang="en-US" sz="4290" dirty="0">
                 <a:solidFill>
@@ -15873,9 +15840,6 @@
               </a:rPr>
               <a:t>سَ</a:t>
             </a:r>
-            <a:pPr algn="ctr" indent="0" marL="0">
-              <a:buNone/>
-            </a:pPr>
             <a:r>
               <a:rPr lang="ar-SA" altLang="en-US" sz="4290" dirty="0">
                 <a:solidFill>
@@ -15887,9 +15851,6 @@
               </a:rPr>
               <a:t>ا</a:t>
             </a:r>
-            <a:pPr algn="ctr" indent="0" marL="0">
-              <a:buNone/>
-            </a:pPr>
             <a:r>
               <a:rPr lang="ar-SA" altLang="en-US" sz="6600" dirty="0">
                 <a:solidFill>
@@ -17602,9 +17563,6 @@
               </a:rPr>
               <a:t>سَ</a:t>
             </a:r>
-            <a:pPr algn="ctr" indent="0" marL="0">
-              <a:buNone/>
-            </a:pPr>
             <a:r>
               <a:rPr lang="ar-SA" altLang="en-US" sz="4290" dirty="0">
                 <a:solidFill>
@@ -17616,9 +17574,6 @@
               </a:rPr>
               <a:t>ا</a:t>
             </a:r>
-            <a:pPr algn="ctr" indent="0" marL="0">
-              <a:buNone/>
-            </a:pPr>
             <a:r>
               <a:rPr lang="ar-SA" altLang="en-US" sz="6600" dirty="0">
                 <a:solidFill>
@@ -19331,9 +19286,6 @@
               </a:rPr>
               <a:t>سَ</a:t>
             </a:r>
-            <a:pPr algn="ctr" indent="0" marL="0">
-              <a:buNone/>
-            </a:pPr>
             <a:r>
               <a:rPr lang="ar-SA" altLang="en-US" sz="4290" dirty="0">
                 <a:solidFill>
@@ -19345,9 +19297,6 @@
               </a:rPr>
               <a:t>ا</a:t>
             </a:r>
-            <a:pPr algn="ctr" indent="0" marL="0">
-              <a:buNone/>
-            </a:pPr>
             <a:r>
               <a:rPr lang="ar-SA" altLang="en-US" sz="6600" dirty="0">
                 <a:solidFill>
@@ -20932,9 +20881,6 @@
               </a:rPr>
               <a:t>كَسَ</a:t>
             </a:r>
-            <a:pPr algn="ctr" indent="0" marL="0">
-              <a:buNone/>
-            </a:pPr>
             <a:r>
               <a:rPr lang="ar-SA" altLang="en-US" sz="5850" dirty="0">
                 <a:solidFill>
@@ -22485,9 +22431,6 @@
               </a:rPr>
               <a:t>نَقَشَ</a:t>
             </a:r>
-            <a:pPr algn="ctr" indent="0" marL="0">
-              <a:buNone/>
-            </a:pPr>
             <a:r>
               <a:rPr lang="ar-SA" altLang="en-US" sz="4290" dirty="0">
                 <a:solidFill>
@@ -24200,9 +24143,6 @@
               </a:rPr>
               <a:t>فَتَشَ</a:t>
             </a:r>
-            <a:pPr algn="ctr" indent="0" marL="0">
-              <a:buNone/>
-            </a:pPr>
             <a:r>
               <a:rPr lang="ar-SA" altLang="en-US" sz="4290" dirty="0">
                 <a:solidFill>
@@ -25915,9 +25855,6 @@
               </a:rPr>
               <a:t>خَدَشَ</a:t>
             </a:r>
-            <a:pPr algn="ctr" indent="0" marL="0">
-              <a:buNone/>
-            </a:pPr>
             <a:r>
               <a:rPr lang="ar-SA" altLang="en-US" sz="4290" dirty="0">
                 <a:solidFill>
@@ -27630,9 +27567,6 @@
               </a:rPr>
               <a:t>شَ</a:t>
             </a:r>
-            <a:pPr algn="ctr" indent="0" marL="0">
-              <a:buNone/>
-            </a:pPr>
             <a:r>
               <a:rPr lang="ar-SA" altLang="en-US" sz="4290" dirty="0">
                 <a:solidFill>
@@ -27644,9 +27578,6 @@
               </a:rPr>
               <a:t>ا</a:t>
             </a:r>
-            <a:pPr algn="ctr" indent="0" marL="0">
-              <a:buNone/>
-            </a:pPr>
             <a:r>
               <a:rPr lang="ar-SA" altLang="en-US" sz="6600" dirty="0">
                 <a:solidFill>
@@ -29359,9 +29290,6 @@
               </a:rPr>
               <a:t>شَ</a:t>
             </a:r>
-            <a:pPr algn="ctr" indent="0" marL="0">
-              <a:buNone/>
-            </a:pPr>
             <a:r>
               <a:rPr lang="ar-SA" altLang="en-US" sz="4290" dirty="0">
                 <a:solidFill>
@@ -29373,9 +29301,6 @@
               </a:rPr>
               <a:t>ا</a:t>
             </a:r>
-            <a:pPr algn="ctr" indent="0" marL="0">
-              <a:buNone/>
-            </a:pPr>
             <a:r>
               <a:rPr lang="ar-SA" altLang="en-US" sz="6600" dirty="0">
                 <a:solidFill>
@@ -31088,9 +31013,6 @@
               </a:rPr>
               <a:t>شَ</a:t>
             </a:r>
-            <a:pPr algn="ctr" indent="0" marL="0">
-              <a:buNone/>
-            </a:pPr>
             <a:r>
               <a:rPr lang="ar-SA" altLang="en-US" sz="4290" dirty="0">
                 <a:solidFill>
@@ -31102,9 +31024,6 @@
               </a:rPr>
               <a:t>ا</a:t>
             </a:r>
-            <a:pPr algn="ctr" indent="0" marL="0">
-              <a:buNone/>
-            </a:pPr>
             <a:r>
               <a:rPr lang="ar-SA" altLang="en-US" sz="6600" dirty="0">
                 <a:solidFill>
@@ -32689,9 +32608,6 @@
               </a:rPr>
               <a:t>حَسَ</a:t>
             </a:r>
-            <a:pPr algn="ctr" indent="0" marL="0">
-              <a:buNone/>
-            </a:pPr>
             <a:r>
               <a:rPr lang="ar-SA" altLang="en-US" sz="5850" dirty="0">
                 <a:solidFill>
@@ -34114,9 +34030,6 @@
               </a:rPr>
               <a:t>رَسَ</a:t>
             </a:r>
-            <a:pPr algn="ctr" indent="0" marL="0">
-              <a:buNone/>
-            </a:pPr>
             <a:r>
               <a:rPr lang="ar-SA" altLang="en-US" sz="5850" dirty="0">
                 <a:solidFill>
@@ -35539,9 +35452,6 @@
               </a:rPr>
               <a:t>سَ</a:t>
             </a:r>
-            <a:pPr algn="ctr" indent="0" marL="0">
-              <a:buNone/>
-            </a:pPr>
             <a:r>
               <a:rPr lang="ar-SA" altLang="en-US" sz="5850" dirty="0">
                 <a:solidFill>
@@ -35553,9 +35463,6 @@
               </a:rPr>
               <a:t>ا</a:t>
             </a:r>
-            <a:pPr algn="ctr" indent="0" marL="0">
-              <a:buNone/>
-            </a:pPr>
             <a:r>
               <a:rPr lang="ar-SA" altLang="en-US" sz="9000" dirty="0">
                 <a:solidFill>
@@ -36978,9 +36885,6 @@
               </a:rPr>
               <a:t>سَ</a:t>
             </a:r>
-            <a:pPr algn="ctr" indent="0" marL="0">
-              <a:buNone/>
-            </a:pPr>
             <a:r>
               <a:rPr lang="ar-SA" altLang="en-US" sz="5850" dirty="0">
                 <a:solidFill>
@@ -36992,9 +36896,6 @@
               </a:rPr>
               <a:t>ا</a:t>
             </a:r>
-            <a:pPr algn="ctr" indent="0" marL="0">
-              <a:buNone/>
-            </a:pPr>
             <a:r>
               <a:rPr lang="ar-SA" altLang="en-US" sz="9000" dirty="0">
                 <a:solidFill>
@@ -38417,9 +38318,6 @@
               </a:rPr>
               <a:t>سَ</a:t>
             </a:r>
-            <a:pPr algn="ctr" indent="0" marL="0">
-              <a:buNone/>
-            </a:pPr>
             <a:r>
               <a:rPr lang="ar-SA" altLang="en-US" sz="5850" dirty="0">
                 <a:solidFill>
@@ -38431,9 +38329,6 @@
               </a:rPr>
               <a:t>ا</a:t>
             </a:r>
-            <a:pPr algn="ctr" indent="0" marL="0">
-              <a:buNone/>
-            </a:pPr>
             <a:r>
               <a:rPr lang="ar-SA" altLang="en-US" sz="9000" dirty="0">
                 <a:solidFill>
@@ -40778,9 +40673,6 @@
               </a:rPr>
               <a:t>شَ</a:t>
             </a:r>
-            <a:pPr algn="ctr" indent="0" marL="0">
-              <a:buNone/>
-            </a:pPr>
             <a:r>
               <a:rPr lang="ar-SA" altLang="en-US" sz="5850" dirty="0">
                 <a:solidFill>
@@ -40792,9 +40684,6 @@
               </a:rPr>
               <a:t>ا</a:t>
             </a:r>
-            <a:pPr algn="ctr" indent="0" marL="0">
-              <a:buNone/>
-            </a:pPr>
             <a:r>
               <a:rPr lang="ar-SA" altLang="en-US" sz="9000" dirty="0">
                 <a:solidFill>
